--- a/Articles/Dashboard.pptx
+++ b/Articles/Dashboard.pptx
@@ -104,6 +104,11 @@
       </a:defRPr>
     </a:lvl9pPr>
   </p:defaultTextStyle>
+  <p:extLst>
+    <p:ext uri="{EFAFB233-063F-42B5-8137-9DF3F51BA10A}">
+      <p15:sldGuideLst xmlns:p15="http://schemas.microsoft.com/office/powerpoint/2012/main"/>
+    </p:ext>
+  </p:extLst>
 </p:presentation>
 </file>
 
@@ -256,7 +261,7 @@
           <a:p>
             <a:fld id="{9FC753B4-9E2D-4E45-8CAC-1BAB6C5C4ACB}" type="datetimeFigureOut">
               <a:rPr lang="en-GB" smtClean="0"/>
-              <a:t>02/05/2025</a:t>
+              <a:t>16/06/2025</a:t>
             </a:fld>
             <a:endParaRPr lang="en-GB"/>
           </a:p>
@@ -456,7 +461,7 @@
           <a:p>
             <a:fld id="{9FC753B4-9E2D-4E45-8CAC-1BAB6C5C4ACB}" type="datetimeFigureOut">
               <a:rPr lang="en-GB" smtClean="0"/>
-              <a:t>02/05/2025</a:t>
+              <a:t>16/06/2025</a:t>
             </a:fld>
             <a:endParaRPr lang="en-GB"/>
           </a:p>
@@ -666,7 +671,7 @@
           <a:p>
             <a:fld id="{9FC753B4-9E2D-4E45-8CAC-1BAB6C5C4ACB}" type="datetimeFigureOut">
               <a:rPr lang="en-GB" smtClean="0"/>
-              <a:t>02/05/2025</a:t>
+              <a:t>16/06/2025</a:t>
             </a:fld>
             <a:endParaRPr lang="en-GB"/>
           </a:p>
@@ -866,7 +871,7 @@
           <a:p>
             <a:fld id="{9FC753B4-9E2D-4E45-8CAC-1BAB6C5C4ACB}" type="datetimeFigureOut">
               <a:rPr lang="en-GB" smtClean="0"/>
-              <a:t>02/05/2025</a:t>
+              <a:t>16/06/2025</a:t>
             </a:fld>
             <a:endParaRPr lang="en-GB"/>
           </a:p>
@@ -1142,7 +1147,7 @@
           <a:p>
             <a:fld id="{9FC753B4-9E2D-4E45-8CAC-1BAB6C5C4ACB}" type="datetimeFigureOut">
               <a:rPr lang="en-GB" smtClean="0"/>
-              <a:t>02/05/2025</a:t>
+              <a:t>16/06/2025</a:t>
             </a:fld>
             <a:endParaRPr lang="en-GB"/>
           </a:p>
@@ -1410,7 +1415,7 @@
           <a:p>
             <a:fld id="{9FC753B4-9E2D-4E45-8CAC-1BAB6C5C4ACB}" type="datetimeFigureOut">
               <a:rPr lang="en-GB" smtClean="0"/>
-              <a:t>02/05/2025</a:t>
+              <a:t>16/06/2025</a:t>
             </a:fld>
             <a:endParaRPr lang="en-GB"/>
           </a:p>
@@ -1825,7 +1830,7 @@
           <a:p>
             <a:fld id="{9FC753B4-9E2D-4E45-8CAC-1BAB6C5C4ACB}" type="datetimeFigureOut">
               <a:rPr lang="en-GB" smtClean="0"/>
-              <a:t>02/05/2025</a:t>
+              <a:t>16/06/2025</a:t>
             </a:fld>
             <a:endParaRPr lang="en-GB"/>
           </a:p>
@@ -1967,7 +1972,7 @@
           <a:p>
             <a:fld id="{9FC753B4-9E2D-4E45-8CAC-1BAB6C5C4ACB}" type="datetimeFigureOut">
               <a:rPr lang="en-GB" smtClean="0"/>
-              <a:t>02/05/2025</a:t>
+              <a:t>16/06/2025</a:t>
             </a:fld>
             <a:endParaRPr lang="en-GB"/>
           </a:p>
@@ -2080,7 +2085,7 @@
           <a:p>
             <a:fld id="{9FC753B4-9E2D-4E45-8CAC-1BAB6C5C4ACB}" type="datetimeFigureOut">
               <a:rPr lang="en-GB" smtClean="0"/>
-              <a:t>02/05/2025</a:t>
+              <a:t>16/06/2025</a:t>
             </a:fld>
             <a:endParaRPr lang="en-GB"/>
           </a:p>
@@ -2393,7 +2398,7 @@
           <a:p>
             <a:fld id="{9FC753B4-9E2D-4E45-8CAC-1BAB6C5C4ACB}" type="datetimeFigureOut">
               <a:rPr lang="en-GB" smtClean="0"/>
-              <a:t>02/05/2025</a:t>
+              <a:t>16/06/2025</a:t>
             </a:fld>
             <a:endParaRPr lang="en-GB"/>
           </a:p>
@@ -2682,7 +2687,7 @@
           <a:p>
             <a:fld id="{9FC753B4-9E2D-4E45-8CAC-1BAB6C5C4ACB}" type="datetimeFigureOut">
               <a:rPr lang="en-GB" smtClean="0"/>
-              <a:t>02/05/2025</a:t>
+              <a:t>16/06/2025</a:t>
             </a:fld>
             <a:endParaRPr lang="en-GB"/>
           </a:p>
@@ -2925,7 +2930,7 @@
           <a:p>
             <a:fld id="{9FC753B4-9E2D-4E45-8CAC-1BAB6C5C4ACB}" type="datetimeFigureOut">
               <a:rPr lang="en-GB" smtClean="0"/>
-              <a:t>02/05/2025</a:t>
+              <a:t>16/06/2025</a:t>
             </a:fld>
             <a:endParaRPr lang="en-GB"/>
           </a:p>
@@ -3342,456 +3347,477 @@
           <a:chExt cx="0" cy="0"/>
         </a:xfrm>
       </p:grpSpPr>
-      <p:pic>
-        <p:nvPicPr>
-          <p:cNvPr id="5" name="Picture 4">
-            <a:extLst>
-              <a:ext uri="{FF2B5EF4-FFF2-40B4-BE49-F238E27FC236}">
-                <a16:creationId xmlns:a16="http://schemas.microsoft.com/office/drawing/2014/main" id="{41D24C7E-57AD-BCDB-3898-05D0E13A3548}"/>
-              </a:ext>
-            </a:extLst>
-          </p:cNvPr>
-          <p:cNvPicPr>
-            <a:picLocks noChangeAspect="1"/>
-          </p:cNvPicPr>
+      <p:grpSp>
+        <p:nvGrpSpPr>
+          <p:cNvPr id="2" name="Group 1">
+            <a:extLst>
+              <a:ext uri="{FF2B5EF4-FFF2-40B4-BE49-F238E27FC236}">
+                <a16:creationId xmlns:a16="http://schemas.microsoft.com/office/drawing/2014/main" id="{2644E0F2-B973-9893-96AF-0EF10DFE0877}"/>
+              </a:ext>
+            </a:extLst>
+          </p:cNvPr>
+          <p:cNvGrpSpPr/>
           <p:nvPr/>
-        </p:nvPicPr>
-        <p:blipFill>
-          <a:blip r:embed="rId2"/>
-          <a:stretch>
-            <a:fillRect/>
-          </a:stretch>
-        </p:blipFill>
-        <p:spPr>
+        </p:nvGrpSpPr>
+        <p:grpSpPr>
           <a:xfrm>
             <a:off x="1234440" y="557784"/>
             <a:ext cx="9570720" cy="5742432"/>
+            <a:chOff x="1234440" y="557784"/>
+            <a:chExt cx="9570720" cy="5742432"/>
           </a:xfrm>
-          <a:prstGeom prst="rect">
-            <a:avLst/>
-          </a:prstGeom>
-        </p:spPr>
-      </p:pic>
-      <p:sp>
-        <p:nvSpPr>
-          <p:cNvPr id="6" name="TextBox 5">
-            <a:extLst>
-              <a:ext uri="{FF2B5EF4-FFF2-40B4-BE49-F238E27FC236}">
-                <a16:creationId xmlns:a16="http://schemas.microsoft.com/office/drawing/2014/main" id="{446C8ED1-0B08-08E1-C113-26891DA1B9AA}"/>
-              </a:ext>
-            </a:extLst>
-          </p:cNvPr>
-          <p:cNvSpPr txBox="1"/>
-          <p:nvPr/>
-        </p:nvSpPr>
-        <p:spPr>
-          <a:xfrm>
-            <a:off x="4914900" y="2141268"/>
-            <a:ext cx="859536" cy="369332"/>
-          </a:xfrm>
-          <a:prstGeom prst="rect">
-            <a:avLst/>
-          </a:prstGeom>
-          <a:noFill/>
-        </p:spPr>
-        <p:txBody>
-          <a:bodyPr wrap="square" rtlCol="0">
-            <a:spAutoFit/>
-          </a:bodyPr>
-          <a:lstStyle/>
-          <a:p>
-            <a:r>
-              <a:rPr lang="en-GB" dirty="0">
-                <a:solidFill>
-                  <a:schemeClr val="bg1"/>
-                </a:solidFill>
-              </a:rPr>
-              <a:t>Charts</a:t>
-            </a:r>
-          </a:p>
-        </p:txBody>
-      </p:sp>
-      <p:cxnSp>
-        <p:nvCxnSpPr>
-          <p:cNvPr id="8" name="Straight Arrow Connector 7">
-            <a:extLst>
-              <a:ext uri="{FF2B5EF4-FFF2-40B4-BE49-F238E27FC236}">
-                <a16:creationId xmlns:a16="http://schemas.microsoft.com/office/drawing/2014/main" id="{6EDF38F1-63A7-E426-C205-8A9004120319}"/>
-              </a:ext>
-            </a:extLst>
-          </p:cNvPr>
-          <p:cNvCxnSpPr>
-            <a:cxnSpLocks/>
-          </p:cNvCxnSpPr>
-          <p:nvPr/>
-        </p:nvCxnSpPr>
-        <p:spPr>
-          <a:xfrm flipH="1">
-            <a:off x="4473702" y="2325934"/>
-            <a:ext cx="441198" cy="0"/>
-          </a:xfrm>
-          <a:prstGeom prst="straightConnector1">
-            <a:avLst/>
-          </a:prstGeom>
-          <a:ln w="38100">
-            <a:solidFill>
-              <a:schemeClr val="bg1"/>
-            </a:solidFill>
-            <a:tailEnd type="triangle"/>
-          </a:ln>
-        </p:spPr>
-        <p:style>
-          <a:lnRef idx="2">
-            <a:schemeClr val="accent1"/>
-          </a:lnRef>
-          <a:fillRef idx="0">
-            <a:schemeClr val="accent1"/>
-          </a:fillRef>
-          <a:effectRef idx="1">
-            <a:schemeClr val="accent1"/>
-          </a:effectRef>
-          <a:fontRef idx="minor">
-            <a:schemeClr val="tx1"/>
-          </a:fontRef>
-        </p:style>
-      </p:cxnSp>
-      <p:cxnSp>
-        <p:nvCxnSpPr>
-          <p:cNvPr id="11" name="Straight Arrow Connector 10">
-            <a:extLst>
-              <a:ext uri="{FF2B5EF4-FFF2-40B4-BE49-F238E27FC236}">
-                <a16:creationId xmlns:a16="http://schemas.microsoft.com/office/drawing/2014/main" id="{BDA422CF-1324-2244-3024-E8CC234CE87C}"/>
-              </a:ext>
-            </a:extLst>
-          </p:cNvPr>
-          <p:cNvCxnSpPr>
-            <a:cxnSpLocks/>
-          </p:cNvCxnSpPr>
-          <p:nvPr/>
-        </p:nvCxnSpPr>
-        <p:spPr>
-          <a:xfrm>
-            <a:off x="5577840" y="2510600"/>
-            <a:ext cx="1033272" cy="1836801"/>
-          </a:xfrm>
-          <a:prstGeom prst="straightConnector1">
-            <a:avLst/>
-          </a:prstGeom>
-          <a:ln w="38100">
-            <a:solidFill>
-              <a:schemeClr val="bg1"/>
-            </a:solidFill>
-            <a:tailEnd type="triangle"/>
-          </a:ln>
-        </p:spPr>
-        <p:style>
-          <a:lnRef idx="2">
-            <a:schemeClr val="accent1"/>
-          </a:lnRef>
-          <a:fillRef idx="0">
-            <a:schemeClr val="accent1"/>
-          </a:fillRef>
-          <a:effectRef idx="1">
-            <a:schemeClr val="accent1"/>
-          </a:effectRef>
-          <a:fontRef idx="minor">
-            <a:schemeClr val="tx1"/>
-          </a:fontRef>
-        </p:style>
-      </p:cxnSp>
-      <p:sp>
-        <p:nvSpPr>
-          <p:cNvPr id="15" name="TextBox 14">
-            <a:extLst>
-              <a:ext uri="{FF2B5EF4-FFF2-40B4-BE49-F238E27FC236}">
-                <a16:creationId xmlns:a16="http://schemas.microsoft.com/office/drawing/2014/main" id="{AEF9E6CC-EF5F-96E0-B7A6-F23A894BC20F}"/>
-              </a:ext>
-            </a:extLst>
-          </p:cNvPr>
-          <p:cNvSpPr txBox="1"/>
-          <p:nvPr/>
-        </p:nvSpPr>
-        <p:spPr>
-          <a:xfrm>
-            <a:off x="1709928" y="3592116"/>
-            <a:ext cx="2357628" cy="369332"/>
-          </a:xfrm>
-          <a:prstGeom prst="rect">
-            <a:avLst/>
-          </a:prstGeom>
-          <a:noFill/>
-        </p:spPr>
-        <p:txBody>
-          <a:bodyPr wrap="square" rtlCol="0">
-            <a:spAutoFit/>
-          </a:bodyPr>
-          <a:lstStyle/>
-          <a:p>
-            <a:r>
-              <a:rPr lang="en-GB" dirty="0">
-                <a:solidFill>
-                  <a:schemeClr val="bg1"/>
-                </a:solidFill>
-              </a:rPr>
-              <a:t>Flight instruments</a:t>
-            </a:r>
-          </a:p>
-        </p:txBody>
-      </p:sp>
-      <p:sp>
-        <p:nvSpPr>
-          <p:cNvPr id="16" name="TextBox 15">
-            <a:extLst>
-              <a:ext uri="{FF2B5EF4-FFF2-40B4-BE49-F238E27FC236}">
-                <a16:creationId xmlns:a16="http://schemas.microsoft.com/office/drawing/2014/main" id="{E34A479A-B400-2351-0E04-4E3320832CCD}"/>
-              </a:ext>
-            </a:extLst>
-          </p:cNvPr>
-          <p:cNvSpPr txBox="1"/>
-          <p:nvPr/>
-        </p:nvSpPr>
-        <p:spPr>
-          <a:xfrm>
-            <a:off x="9285732" y="2865430"/>
-            <a:ext cx="1229868" cy="369332"/>
-          </a:xfrm>
-          <a:prstGeom prst="rect">
-            <a:avLst/>
-          </a:prstGeom>
-          <a:noFill/>
-        </p:spPr>
-        <p:txBody>
-          <a:bodyPr wrap="square" rtlCol="0">
-            <a:spAutoFit/>
-          </a:bodyPr>
-          <a:lstStyle/>
-          <a:p>
-            <a:r>
-              <a:rPr lang="en-GB" dirty="0">
-                <a:solidFill>
-                  <a:schemeClr val="bg1"/>
-                </a:solidFill>
-              </a:rPr>
-              <a:t>Flight data</a:t>
-            </a:r>
-          </a:p>
-        </p:txBody>
-      </p:sp>
-      <p:cxnSp>
-        <p:nvCxnSpPr>
-          <p:cNvPr id="17" name="Straight Arrow Connector 16">
-            <a:extLst>
-              <a:ext uri="{FF2B5EF4-FFF2-40B4-BE49-F238E27FC236}">
-                <a16:creationId xmlns:a16="http://schemas.microsoft.com/office/drawing/2014/main" id="{BFA66D2D-B265-6F9F-867B-06C9A9E2FB1D}"/>
-              </a:ext>
-            </a:extLst>
-          </p:cNvPr>
-          <p:cNvCxnSpPr>
-            <a:cxnSpLocks/>
-          </p:cNvCxnSpPr>
-          <p:nvPr/>
-        </p:nvCxnSpPr>
-        <p:spPr>
-          <a:xfrm flipH="1">
-            <a:off x="8513064" y="3036952"/>
-            <a:ext cx="772668" cy="0"/>
-          </a:xfrm>
-          <a:prstGeom prst="straightConnector1">
-            <a:avLst/>
-          </a:prstGeom>
-          <a:ln w="38100">
-            <a:solidFill>
-              <a:schemeClr val="bg1"/>
-            </a:solidFill>
-            <a:tailEnd type="triangle"/>
-          </a:ln>
-        </p:spPr>
-        <p:style>
-          <a:lnRef idx="2">
-            <a:schemeClr val="accent1"/>
-          </a:lnRef>
-          <a:fillRef idx="0">
-            <a:schemeClr val="accent1"/>
-          </a:fillRef>
-          <a:effectRef idx="1">
-            <a:schemeClr val="accent1"/>
-          </a:effectRef>
-          <a:fontRef idx="minor">
-            <a:schemeClr val="tx1"/>
-          </a:fontRef>
-        </p:style>
-      </p:cxnSp>
-      <p:cxnSp>
-        <p:nvCxnSpPr>
-          <p:cNvPr id="18" name="Straight Arrow Connector 17">
-            <a:extLst>
-              <a:ext uri="{FF2B5EF4-FFF2-40B4-BE49-F238E27FC236}">
-                <a16:creationId xmlns:a16="http://schemas.microsoft.com/office/drawing/2014/main" id="{69A11E8E-E9AF-CD9B-6422-5D38315D14ED}"/>
-              </a:ext>
-            </a:extLst>
-          </p:cNvPr>
-          <p:cNvCxnSpPr>
-            <a:cxnSpLocks/>
-          </p:cNvCxnSpPr>
-          <p:nvPr/>
-        </p:nvCxnSpPr>
-        <p:spPr>
-          <a:xfrm>
-            <a:off x="9900666" y="3234762"/>
-            <a:ext cx="0" cy="678870"/>
-          </a:xfrm>
-          <a:prstGeom prst="straightConnector1">
-            <a:avLst/>
-          </a:prstGeom>
-          <a:ln w="38100">
-            <a:solidFill>
-              <a:schemeClr val="bg1"/>
-            </a:solidFill>
-            <a:tailEnd type="triangle"/>
-          </a:ln>
-        </p:spPr>
-        <p:style>
-          <a:lnRef idx="2">
-            <a:schemeClr val="accent1"/>
-          </a:lnRef>
-          <a:fillRef idx="0">
-            <a:schemeClr val="accent1"/>
-          </a:fillRef>
-          <a:effectRef idx="1">
-            <a:schemeClr val="accent1"/>
-          </a:effectRef>
-          <a:fontRef idx="minor">
-            <a:schemeClr val="tx1"/>
-          </a:fontRef>
-        </p:style>
-      </p:cxnSp>
-      <p:sp>
-        <p:nvSpPr>
-          <p:cNvPr id="20" name="TextBox 19">
-            <a:extLst>
-              <a:ext uri="{FF2B5EF4-FFF2-40B4-BE49-F238E27FC236}">
-                <a16:creationId xmlns:a16="http://schemas.microsoft.com/office/drawing/2014/main" id="{BBE9DF66-D92A-FDBD-9CD8-42325A608502}"/>
-              </a:ext>
-            </a:extLst>
-          </p:cNvPr>
-          <p:cNvSpPr txBox="1"/>
-          <p:nvPr/>
-        </p:nvSpPr>
-        <p:spPr>
-          <a:xfrm>
-            <a:off x="2570988" y="557784"/>
-            <a:ext cx="2993136" cy="369332"/>
-          </a:xfrm>
-          <a:prstGeom prst="rect">
-            <a:avLst/>
-          </a:prstGeom>
-          <a:noFill/>
-        </p:spPr>
-        <p:txBody>
-          <a:bodyPr wrap="square" rtlCol="0">
-            <a:spAutoFit/>
-          </a:bodyPr>
-          <a:lstStyle/>
-          <a:p>
-            <a:r>
-              <a:rPr lang="en-GB" dirty="0">
-                <a:solidFill>
-                  <a:schemeClr val="bg1"/>
-                </a:solidFill>
-              </a:rPr>
-              <a:t>Dashboard configuration</a:t>
-            </a:r>
-          </a:p>
-        </p:txBody>
-      </p:sp>
-      <p:cxnSp>
-        <p:nvCxnSpPr>
-          <p:cNvPr id="21" name="Straight Arrow Connector 20">
-            <a:extLst>
-              <a:ext uri="{FF2B5EF4-FFF2-40B4-BE49-F238E27FC236}">
-                <a16:creationId xmlns:a16="http://schemas.microsoft.com/office/drawing/2014/main" id="{FD2B67C3-A0BA-0341-E7B1-3C08E95A3409}"/>
-              </a:ext>
-            </a:extLst>
-          </p:cNvPr>
-          <p:cNvCxnSpPr>
-            <a:cxnSpLocks/>
-          </p:cNvCxnSpPr>
-          <p:nvPr/>
-        </p:nvCxnSpPr>
-        <p:spPr>
-          <a:xfrm flipH="1">
-            <a:off x="1956816" y="740664"/>
-            <a:ext cx="614172" cy="0"/>
-          </a:xfrm>
-          <a:prstGeom prst="straightConnector1">
-            <a:avLst/>
-          </a:prstGeom>
-          <a:ln w="38100">
-            <a:solidFill>
-              <a:schemeClr val="bg1"/>
-            </a:solidFill>
-            <a:tailEnd type="triangle"/>
-          </a:ln>
-        </p:spPr>
-        <p:style>
-          <a:lnRef idx="2">
-            <a:schemeClr val="accent1"/>
-          </a:lnRef>
-          <a:fillRef idx="0">
-            <a:schemeClr val="accent1"/>
-          </a:fillRef>
-          <a:effectRef idx="1">
-            <a:schemeClr val="accent1"/>
-          </a:effectRef>
-          <a:fontRef idx="minor">
-            <a:schemeClr val="tx1"/>
-          </a:fontRef>
-        </p:style>
-      </p:cxnSp>
-      <p:cxnSp>
-        <p:nvCxnSpPr>
-          <p:cNvPr id="26" name="Straight Arrow Connector 25">
-            <a:extLst>
-              <a:ext uri="{FF2B5EF4-FFF2-40B4-BE49-F238E27FC236}">
-                <a16:creationId xmlns:a16="http://schemas.microsoft.com/office/drawing/2014/main" id="{182A15AF-CCE6-F514-C39C-7E3E1911A204}"/>
-              </a:ext>
-            </a:extLst>
-          </p:cNvPr>
-          <p:cNvCxnSpPr>
-            <a:cxnSpLocks/>
-          </p:cNvCxnSpPr>
-          <p:nvPr/>
-        </p:nvCxnSpPr>
-        <p:spPr>
-          <a:xfrm>
-            <a:off x="2585466" y="3961448"/>
-            <a:ext cx="317754" cy="868680"/>
-          </a:xfrm>
-          <a:prstGeom prst="straightConnector1">
-            <a:avLst/>
-          </a:prstGeom>
-          <a:ln w="38100">
-            <a:solidFill>
-              <a:schemeClr val="bg1"/>
-            </a:solidFill>
-            <a:tailEnd type="triangle"/>
-          </a:ln>
-        </p:spPr>
-        <p:style>
-          <a:lnRef idx="2">
-            <a:schemeClr val="accent1"/>
-          </a:lnRef>
-          <a:fillRef idx="0">
-            <a:schemeClr val="accent1"/>
-          </a:fillRef>
-          <a:effectRef idx="1">
-            <a:schemeClr val="accent1"/>
-          </a:effectRef>
-          <a:fontRef idx="minor">
-            <a:schemeClr val="tx1"/>
-          </a:fontRef>
-        </p:style>
-      </p:cxnSp>
+        </p:grpSpPr>
+        <p:pic>
+          <p:nvPicPr>
+            <p:cNvPr id="5" name="Picture 4">
+              <a:extLst>
+                <a:ext uri="{FF2B5EF4-FFF2-40B4-BE49-F238E27FC236}">
+                  <a16:creationId xmlns:a16="http://schemas.microsoft.com/office/drawing/2014/main" id="{41D24C7E-57AD-BCDB-3898-05D0E13A3548}"/>
+                </a:ext>
+              </a:extLst>
+            </p:cNvPr>
+            <p:cNvPicPr>
+              <a:picLocks noChangeAspect="1"/>
+            </p:cNvPicPr>
+            <p:nvPr/>
+          </p:nvPicPr>
+          <p:blipFill>
+            <a:blip r:embed="rId2"/>
+            <a:stretch>
+              <a:fillRect/>
+            </a:stretch>
+          </p:blipFill>
+          <p:spPr>
+            <a:xfrm>
+              <a:off x="1234440" y="557784"/>
+              <a:ext cx="9570720" cy="5742432"/>
+            </a:xfrm>
+            <a:prstGeom prst="rect">
+              <a:avLst/>
+            </a:prstGeom>
+          </p:spPr>
+        </p:pic>
+        <p:sp>
+          <p:nvSpPr>
+            <p:cNvPr id="6" name="TextBox 5">
+              <a:extLst>
+                <a:ext uri="{FF2B5EF4-FFF2-40B4-BE49-F238E27FC236}">
+                  <a16:creationId xmlns:a16="http://schemas.microsoft.com/office/drawing/2014/main" id="{446C8ED1-0B08-08E1-C113-26891DA1B9AA}"/>
+                </a:ext>
+              </a:extLst>
+            </p:cNvPr>
+            <p:cNvSpPr txBox="1"/>
+            <p:nvPr/>
+          </p:nvSpPr>
+          <p:spPr>
+            <a:xfrm>
+              <a:off x="4914900" y="2141268"/>
+              <a:ext cx="859536" cy="369332"/>
+            </a:xfrm>
+            <a:prstGeom prst="rect">
+              <a:avLst/>
+            </a:prstGeom>
+            <a:noFill/>
+          </p:spPr>
+          <p:txBody>
+            <a:bodyPr wrap="square" rtlCol="0">
+              <a:spAutoFit/>
+            </a:bodyPr>
+            <a:lstStyle/>
+            <a:p>
+              <a:r>
+                <a:rPr lang="en-GB" dirty="0">
+                  <a:solidFill>
+                    <a:schemeClr val="bg1"/>
+                  </a:solidFill>
+                </a:rPr>
+                <a:t>Charts</a:t>
+              </a:r>
+            </a:p>
+          </p:txBody>
+        </p:sp>
+        <p:cxnSp>
+          <p:nvCxnSpPr>
+            <p:cNvPr id="8" name="Straight Arrow Connector 7">
+              <a:extLst>
+                <a:ext uri="{FF2B5EF4-FFF2-40B4-BE49-F238E27FC236}">
+                  <a16:creationId xmlns:a16="http://schemas.microsoft.com/office/drawing/2014/main" id="{6EDF38F1-63A7-E426-C205-8A9004120319}"/>
+                </a:ext>
+              </a:extLst>
+            </p:cNvPr>
+            <p:cNvCxnSpPr>
+              <a:cxnSpLocks/>
+            </p:cNvCxnSpPr>
+            <p:nvPr/>
+          </p:nvCxnSpPr>
+          <p:spPr>
+            <a:xfrm flipH="1">
+              <a:off x="4473702" y="2325934"/>
+              <a:ext cx="441198" cy="0"/>
+            </a:xfrm>
+            <a:prstGeom prst="straightConnector1">
+              <a:avLst/>
+            </a:prstGeom>
+            <a:ln w="38100">
+              <a:solidFill>
+                <a:schemeClr val="bg1"/>
+              </a:solidFill>
+              <a:tailEnd type="triangle"/>
+            </a:ln>
+          </p:spPr>
+          <p:style>
+            <a:lnRef idx="2">
+              <a:schemeClr val="accent1"/>
+            </a:lnRef>
+            <a:fillRef idx="0">
+              <a:schemeClr val="accent1"/>
+            </a:fillRef>
+            <a:effectRef idx="1">
+              <a:schemeClr val="accent1"/>
+            </a:effectRef>
+            <a:fontRef idx="minor">
+              <a:schemeClr val="tx1"/>
+            </a:fontRef>
+          </p:style>
+        </p:cxnSp>
+        <p:cxnSp>
+          <p:nvCxnSpPr>
+            <p:cNvPr id="11" name="Straight Arrow Connector 10">
+              <a:extLst>
+                <a:ext uri="{FF2B5EF4-FFF2-40B4-BE49-F238E27FC236}">
+                  <a16:creationId xmlns:a16="http://schemas.microsoft.com/office/drawing/2014/main" id="{BDA422CF-1324-2244-3024-E8CC234CE87C}"/>
+                </a:ext>
+              </a:extLst>
+            </p:cNvPr>
+            <p:cNvCxnSpPr>
+              <a:cxnSpLocks/>
+            </p:cNvCxnSpPr>
+            <p:nvPr/>
+          </p:nvCxnSpPr>
+          <p:spPr>
+            <a:xfrm>
+              <a:off x="5577840" y="2510600"/>
+              <a:ext cx="1033272" cy="1836801"/>
+            </a:xfrm>
+            <a:prstGeom prst="straightConnector1">
+              <a:avLst/>
+            </a:prstGeom>
+            <a:ln w="38100">
+              <a:solidFill>
+                <a:schemeClr val="bg1"/>
+              </a:solidFill>
+              <a:tailEnd type="triangle"/>
+            </a:ln>
+          </p:spPr>
+          <p:style>
+            <a:lnRef idx="2">
+              <a:schemeClr val="accent1"/>
+            </a:lnRef>
+            <a:fillRef idx="0">
+              <a:schemeClr val="accent1"/>
+            </a:fillRef>
+            <a:effectRef idx="1">
+              <a:schemeClr val="accent1"/>
+            </a:effectRef>
+            <a:fontRef idx="minor">
+              <a:schemeClr val="tx1"/>
+            </a:fontRef>
+          </p:style>
+        </p:cxnSp>
+        <p:sp>
+          <p:nvSpPr>
+            <p:cNvPr id="15" name="TextBox 14">
+              <a:extLst>
+                <a:ext uri="{FF2B5EF4-FFF2-40B4-BE49-F238E27FC236}">
+                  <a16:creationId xmlns:a16="http://schemas.microsoft.com/office/drawing/2014/main" id="{AEF9E6CC-EF5F-96E0-B7A6-F23A894BC20F}"/>
+                </a:ext>
+              </a:extLst>
+            </p:cNvPr>
+            <p:cNvSpPr txBox="1"/>
+            <p:nvPr/>
+          </p:nvSpPr>
+          <p:spPr>
+            <a:xfrm>
+              <a:off x="1709928" y="3592116"/>
+              <a:ext cx="2357628" cy="369332"/>
+            </a:xfrm>
+            <a:prstGeom prst="rect">
+              <a:avLst/>
+            </a:prstGeom>
+            <a:noFill/>
+          </p:spPr>
+          <p:txBody>
+            <a:bodyPr wrap="square" rtlCol="0">
+              <a:spAutoFit/>
+            </a:bodyPr>
+            <a:lstStyle/>
+            <a:p>
+              <a:r>
+                <a:rPr lang="en-GB" dirty="0">
+                  <a:solidFill>
+                    <a:schemeClr val="bg1"/>
+                  </a:solidFill>
+                </a:rPr>
+                <a:t>Flight instruments</a:t>
+              </a:r>
+            </a:p>
+          </p:txBody>
+        </p:sp>
+        <p:sp>
+          <p:nvSpPr>
+            <p:cNvPr id="16" name="TextBox 15">
+              <a:extLst>
+                <a:ext uri="{FF2B5EF4-FFF2-40B4-BE49-F238E27FC236}">
+                  <a16:creationId xmlns:a16="http://schemas.microsoft.com/office/drawing/2014/main" id="{E34A479A-B400-2351-0E04-4E3320832CCD}"/>
+                </a:ext>
+              </a:extLst>
+            </p:cNvPr>
+            <p:cNvSpPr txBox="1"/>
+            <p:nvPr/>
+          </p:nvSpPr>
+          <p:spPr>
+            <a:xfrm>
+              <a:off x="9285732" y="2865430"/>
+              <a:ext cx="1229868" cy="369332"/>
+            </a:xfrm>
+            <a:prstGeom prst="rect">
+              <a:avLst/>
+            </a:prstGeom>
+            <a:noFill/>
+          </p:spPr>
+          <p:txBody>
+            <a:bodyPr wrap="square" rtlCol="0">
+              <a:spAutoFit/>
+            </a:bodyPr>
+            <a:lstStyle/>
+            <a:p>
+              <a:r>
+                <a:rPr lang="en-GB" dirty="0">
+                  <a:solidFill>
+                    <a:schemeClr val="bg1"/>
+                  </a:solidFill>
+                </a:rPr>
+                <a:t>Flight data</a:t>
+              </a:r>
+            </a:p>
+          </p:txBody>
+        </p:sp>
+        <p:cxnSp>
+          <p:nvCxnSpPr>
+            <p:cNvPr id="17" name="Straight Arrow Connector 16">
+              <a:extLst>
+                <a:ext uri="{FF2B5EF4-FFF2-40B4-BE49-F238E27FC236}">
+                  <a16:creationId xmlns:a16="http://schemas.microsoft.com/office/drawing/2014/main" id="{BFA66D2D-B265-6F9F-867B-06C9A9E2FB1D}"/>
+                </a:ext>
+              </a:extLst>
+            </p:cNvPr>
+            <p:cNvCxnSpPr>
+              <a:cxnSpLocks/>
+            </p:cNvCxnSpPr>
+            <p:nvPr/>
+          </p:nvCxnSpPr>
+          <p:spPr>
+            <a:xfrm flipH="1">
+              <a:off x="8513064" y="3036952"/>
+              <a:ext cx="772668" cy="0"/>
+            </a:xfrm>
+            <a:prstGeom prst="straightConnector1">
+              <a:avLst/>
+            </a:prstGeom>
+            <a:ln w="38100">
+              <a:solidFill>
+                <a:schemeClr val="bg1"/>
+              </a:solidFill>
+              <a:tailEnd type="triangle"/>
+            </a:ln>
+          </p:spPr>
+          <p:style>
+            <a:lnRef idx="2">
+              <a:schemeClr val="accent1"/>
+            </a:lnRef>
+            <a:fillRef idx="0">
+              <a:schemeClr val="accent1"/>
+            </a:fillRef>
+            <a:effectRef idx="1">
+              <a:schemeClr val="accent1"/>
+            </a:effectRef>
+            <a:fontRef idx="minor">
+              <a:schemeClr val="tx1"/>
+            </a:fontRef>
+          </p:style>
+        </p:cxnSp>
+        <p:cxnSp>
+          <p:nvCxnSpPr>
+            <p:cNvPr id="18" name="Straight Arrow Connector 17">
+              <a:extLst>
+                <a:ext uri="{FF2B5EF4-FFF2-40B4-BE49-F238E27FC236}">
+                  <a16:creationId xmlns:a16="http://schemas.microsoft.com/office/drawing/2014/main" id="{69A11E8E-E9AF-CD9B-6422-5D38315D14ED}"/>
+                </a:ext>
+              </a:extLst>
+            </p:cNvPr>
+            <p:cNvCxnSpPr>
+              <a:cxnSpLocks/>
+            </p:cNvCxnSpPr>
+            <p:nvPr/>
+          </p:nvCxnSpPr>
+          <p:spPr>
+            <a:xfrm>
+              <a:off x="9900666" y="3234762"/>
+              <a:ext cx="0" cy="678870"/>
+            </a:xfrm>
+            <a:prstGeom prst="straightConnector1">
+              <a:avLst/>
+            </a:prstGeom>
+            <a:ln w="38100">
+              <a:solidFill>
+                <a:schemeClr val="bg1"/>
+              </a:solidFill>
+              <a:tailEnd type="triangle"/>
+            </a:ln>
+          </p:spPr>
+          <p:style>
+            <a:lnRef idx="2">
+              <a:schemeClr val="accent1"/>
+            </a:lnRef>
+            <a:fillRef idx="0">
+              <a:schemeClr val="accent1"/>
+            </a:fillRef>
+            <a:effectRef idx="1">
+              <a:schemeClr val="accent1"/>
+            </a:effectRef>
+            <a:fontRef idx="minor">
+              <a:schemeClr val="tx1"/>
+            </a:fontRef>
+          </p:style>
+        </p:cxnSp>
+        <p:sp>
+          <p:nvSpPr>
+            <p:cNvPr id="20" name="TextBox 19">
+              <a:extLst>
+                <a:ext uri="{FF2B5EF4-FFF2-40B4-BE49-F238E27FC236}">
+                  <a16:creationId xmlns:a16="http://schemas.microsoft.com/office/drawing/2014/main" id="{BBE9DF66-D92A-FDBD-9CD8-42325A608502}"/>
+                </a:ext>
+              </a:extLst>
+            </p:cNvPr>
+            <p:cNvSpPr txBox="1"/>
+            <p:nvPr/>
+          </p:nvSpPr>
+          <p:spPr>
+            <a:xfrm>
+              <a:off x="2570988" y="557784"/>
+              <a:ext cx="2993136" cy="369332"/>
+            </a:xfrm>
+            <a:prstGeom prst="rect">
+              <a:avLst/>
+            </a:prstGeom>
+            <a:noFill/>
+          </p:spPr>
+          <p:txBody>
+            <a:bodyPr wrap="square" rtlCol="0">
+              <a:spAutoFit/>
+            </a:bodyPr>
+            <a:lstStyle/>
+            <a:p>
+              <a:r>
+                <a:rPr lang="en-GB" dirty="0">
+                  <a:solidFill>
+                    <a:schemeClr val="bg1"/>
+                  </a:solidFill>
+                </a:rPr>
+                <a:t>Dashboard configuration</a:t>
+              </a:r>
+            </a:p>
+          </p:txBody>
+        </p:sp>
+        <p:cxnSp>
+          <p:nvCxnSpPr>
+            <p:cNvPr id="21" name="Straight Arrow Connector 20">
+              <a:extLst>
+                <a:ext uri="{FF2B5EF4-FFF2-40B4-BE49-F238E27FC236}">
+                  <a16:creationId xmlns:a16="http://schemas.microsoft.com/office/drawing/2014/main" id="{FD2B67C3-A0BA-0341-E7B1-3C08E95A3409}"/>
+                </a:ext>
+              </a:extLst>
+            </p:cNvPr>
+            <p:cNvCxnSpPr>
+              <a:cxnSpLocks/>
+            </p:cNvCxnSpPr>
+            <p:nvPr/>
+          </p:nvCxnSpPr>
+          <p:spPr>
+            <a:xfrm flipH="1">
+              <a:off x="1956816" y="740664"/>
+              <a:ext cx="614172" cy="0"/>
+            </a:xfrm>
+            <a:prstGeom prst="straightConnector1">
+              <a:avLst/>
+            </a:prstGeom>
+            <a:ln w="38100">
+              <a:solidFill>
+                <a:schemeClr val="bg1"/>
+              </a:solidFill>
+              <a:tailEnd type="triangle"/>
+            </a:ln>
+          </p:spPr>
+          <p:style>
+            <a:lnRef idx="2">
+              <a:schemeClr val="accent1"/>
+            </a:lnRef>
+            <a:fillRef idx="0">
+              <a:schemeClr val="accent1"/>
+            </a:fillRef>
+            <a:effectRef idx="1">
+              <a:schemeClr val="accent1"/>
+            </a:effectRef>
+            <a:fontRef idx="minor">
+              <a:schemeClr val="tx1"/>
+            </a:fontRef>
+          </p:style>
+        </p:cxnSp>
+        <p:cxnSp>
+          <p:nvCxnSpPr>
+            <p:cNvPr id="26" name="Straight Arrow Connector 25">
+              <a:extLst>
+                <a:ext uri="{FF2B5EF4-FFF2-40B4-BE49-F238E27FC236}">
+                  <a16:creationId xmlns:a16="http://schemas.microsoft.com/office/drawing/2014/main" id="{182A15AF-CCE6-F514-C39C-7E3E1911A204}"/>
+                </a:ext>
+              </a:extLst>
+            </p:cNvPr>
+            <p:cNvCxnSpPr>
+              <a:cxnSpLocks/>
+            </p:cNvCxnSpPr>
+            <p:nvPr/>
+          </p:nvCxnSpPr>
+          <p:spPr>
+            <a:xfrm>
+              <a:off x="2585466" y="3961448"/>
+              <a:ext cx="317754" cy="868680"/>
+            </a:xfrm>
+            <a:prstGeom prst="straightConnector1">
+              <a:avLst/>
+            </a:prstGeom>
+            <a:ln w="38100">
+              <a:solidFill>
+                <a:schemeClr val="bg1"/>
+              </a:solidFill>
+              <a:tailEnd type="triangle"/>
+            </a:ln>
+          </p:spPr>
+          <p:style>
+            <a:lnRef idx="2">
+              <a:schemeClr val="accent1"/>
+            </a:lnRef>
+            <a:fillRef idx="0">
+              <a:schemeClr val="accent1"/>
+            </a:fillRef>
+            <a:effectRef idx="1">
+              <a:schemeClr val="accent1"/>
+            </a:effectRef>
+            <a:fontRef idx="minor">
+              <a:schemeClr val="tx1"/>
+            </a:fontRef>
+          </p:style>
+        </p:cxnSp>
+      </p:grpSp>
     </p:spTree>
     <p:extLst>
       <p:ext uri="{BB962C8B-B14F-4D97-AF65-F5344CB8AC3E}">
